--- a/builder/assets/reference-pages/hr-new-hire-survival.pptx
+++ b/builder/assets/reference-pages/hr-new-hire-survival.pptx
@@ -1097,7 +1097,7 @@
                   <a:srgbClr val="15375F"/>
                 </a:solidFill>
               </a:rPr>
-              <a:t>新人在第 3 个月和第 13 个月出现两个陡降拐点，1 年留存率仅 62%，低于行业 75%</a:t>
+              <a:t>Newcomer is here 3 month and month 13 There were two steep turning points in the month.1 The annual retention rate is only 62%, lower than the industry 75%</a:t>
             </a:r>
           </a:p>
         </p:txBody>
@@ -9111,7 +9111,7 @@
                   <a:srgbClr val="15375F"/>
                 </a:solidFill>
               </a:rPr>
-              <a:t>● 校招  12月 67%｜24月 50%</a:t>
+              <a:t>● School recruitment  12month 67%｜24month 50%</a:t>
             </a:r>
           </a:p>
         </p:txBody>
@@ -9161,7 +9161,7 @@
                   <a:srgbClr val="E8872D"/>
                 </a:solidFill>
               </a:rPr>
-              <a:t>● 社招  12月 59%｜24月 38%</a:t>
+              <a:t>● Social recruitment  12month 59%｜24month 38%</a:t>
             </a:r>
           </a:p>
         </p:txBody>
@@ -9211,7 +9211,7 @@
                   <a:srgbClr val="2F6FB2"/>
                 </a:solidFill>
               </a:rPr>
-              <a:t>● 内推  12月 73%｜24月 58%</a:t>
+              <a:t>● Referral  12month 73%｜24month 58%</a:t>
             </a:r>
           </a:p>
         </p:txBody>
@@ -9261,7 +9261,7 @@
                   <a:srgbClr val="7397BD"/>
                 </a:solidFill>
               </a:rPr>
-              <a:t>● 猎头  12月 63%｜24月 44%</a:t>
+              <a:t>● Headhunter  12month 63%｜24month 44%</a:t>
             </a:r>
           </a:p>
         </p:txBody>
@@ -9311,7 +9311,7 @@
                   <a:srgbClr val="697386"/>
                 </a:solidFill>
               </a:rPr>
-              <a:t>灰虚线：行业基准</a:t>
+              <a:t>Dotted gray line: industry benchmark</a:t>
             </a:r>
           </a:p>
         </p:txBody>
@@ -9361,7 +9361,7 @@
                   <a:srgbClr val="E8872D"/>
                 </a:solidFill>
               </a:rPr>
-              <a:t>3 个月：融入与岗位匹配问题        13 个月：晋升与调薪预期落空</a:t>
+              <a:t>3 Month: Integration and job matching issues        13 Month: Promotion and salary increase expectations fell through</a:t>
             </a:r>
           </a:p>
         </p:txBody>
@@ -9411,7 +9411,7 @@
                   <a:srgbClr val="15375F"/>
                 </a:solidFill>
               </a:rPr>
-              <a:t>试用期评估通过率</a:t>
+              <a:t>Probation period assessment pass rate</a:t>
             </a:r>
           </a:p>
         </p:txBody>
@@ -9465,7 +9465,7 @@
                   <a:srgbClr val="FFFFFF"/>
                 </a:solidFill>
               </a:rPr>
-              <a:t>高</a:t>
+              <a:t>high</a:t>
             </a:r>
           </a:p>
         </p:txBody>
@@ -9519,7 +9519,7 @@
                   <a:srgbClr val="172033"/>
                 </a:solidFill>
               </a:rPr>
-              <a:t>中</a:t>
+              <a:t>in</a:t>
             </a:r>
           </a:p>
         </p:txBody>
@@ -9573,7 +9573,7 @@
                   <a:srgbClr val="172033"/>
                 </a:solidFill>
               </a:rPr>
-              <a:t>低</a:t>
+              <a:t>low</a:t>
             </a:r>
           </a:p>
         </p:txBody>
@@ -9627,7 +9627,7 @@
                   <a:srgbClr val="172033"/>
                 </a:solidFill>
               </a:rPr>
-              <a:t>低</a:t>
+              <a:t>low</a:t>
             </a:r>
           </a:p>
         </p:txBody>
@@ -9681,7 +9681,7 @@
                   <a:srgbClr val="172033"/>
                 </a:solidFill>
               </a:rPr>
-              <a:t>低</a:t>
+              <a:t>low</a:t>
             </a:r>
           </a:p>
         </p:txBody>
@@ -9731,7 +9731,7 @@
                   <a:srgbClr val="15375F"/>
                 </a:solidFill>
               </a:rPr>
-              <a:t>直属上级变更率</a:t>
+              <a:t>Change rate of immediate superiors</a:t>
             </a:r>
           </a:p>
         </p:txBody>
@@ -9785,7 +9785,7 @@
                   <a:srgbClr val="172033"/>
                 </a:solidFill>
               </a:rPr>
-              <a:t>中</a:t>
+              <a:t>in</a:t>
             </a:r>
           </a:p>
         </p:txBody>
@@ -9839,7 +9839,7 @@
                   <a:srgbClr val="FFFFFF"/>
                 </a:solidFill>
               </a:rPr>
-              <a:t>高</a:t>
+              <a:t>high</a:t>
             </a:r>
           </a:p>
         </p:txBody>
@@ -9893,7 +9893,7 @@
                   <a:srgbClr val="172033"/>
                 </a:solidFill>
               </a:rPr>
-              <a:t>中</a:t>
+              <a:t>in</a:t>
             </a:r>
           </a:p>
         </p:txBody>
@@ -9947,7 +9947,7 @@
                   <a:srgbClr val="172033"/>
                 </a:solidFill>
               </a:rPr>
-              <a:t>低</a:t>
+              <a:t>low</a:t>
             </a:r>
           </a:p>
         </p:txBody>
@@ -10001,7 +10001,7 @@
                   <a:srgbClr val="172033"/>
                 </a:solidFill>
               </a:rPr>
-              <a:t>低</a:t>
+              <a:t>low</a:t>
             </a:r>
           </a:p>
         </p:txBody>
@@ -10051,7 +10051,7 @@
                   <a:srgbClr val="15375F"/>
                 </a:solidFill>
               </a:rPr>
-              <a:t>首次调薪触达率</a:t>
+              <a:t>First salary increase reach rate</a:t>
             </a:r>
           </a:p>
         </p:txBody>
@@ -10105,7 +10105,7 @@
                   <a:srgbClr val="172033"/>
                 </a:solidFill>
               </a:rPr>
-              <a:t>低</a:t>
+              <a:t>low</a:t>
             </a:r>
           </a:p>
         </p:txBody>
@@ -10159,7 +10159,7 @@
                   <a:srgbClr val="172033"/>
                 </a:solidFill>
               </a:rPr>
-              <a:t>低</a:t>
+              <a:t>low</a:t>
             </a:r>
           </a:p>
         </p:txBody>
@@ -10213,7 +10213,7 @@
                   <a:srgbClr val="172033"/>
                 </a:solidFill>
               </a:rPr>
-              <a:t>中</a:t>
+              <a:t>in</a:t>
             </a:r>
           </a:p>
         </p:txBody>
@@ -10267,7 +10267,7 @@
                   <a:srgbClr val="FFFFFF"/>
                 </a:solidFill>
               </a:rPr>
-              <a:t>高</a:t>
+              <a:t>high</a:t>
             </a:r>
           </a:p>
         </p:txBody>
@@ -10321,7 +10321,7 @@
                   <a:srgbClr val="172033"/>
                 </a:solidFill>
               </a:rPr>
-              <a:t>中</a:t>
+              <a:t>in</a:t>
             </a:r>
           </a:p>
         </p:txBody>
@@ -10371,7 +10371,7 @@
                   <a:srgbClr val="15375F"/>
                 </a:solidFill>
               </a:rPr>
-              <a:t>培训完成率</a:t>
+              <a:t>training completion rate</a:t>
             </a:r>
           </a:p>
         </p:txBody>
@@ -10425,7 +10425,7 @@
                   <a:srgbClr val="FFFFFF"/>
                 </a:solidFill>
               </a:rPr>
-              <a:t>高</a:t>
+              <a:t>high</a:t>
             </a:r>
           </a:p>
         </p:txBody>
@@ -10479,7 +10479,7 @@
                   <a:srgbClr val="172033"/>
                 </a:solidFill>
               </a:rPr>
-              <a:t>中</a:t>
+              <a:t>in</a:t>
             </a:r>
           </a:p>
         </p:txBody>
@@ -10533,7 +10533,7 @@
                   <a:srgbClr val="172033"/>
                 </a:solidFill>
               </a:rPr>
-              <a:t>低</a:t>
+              <a:t>low</a:t>
             </a:r>
           </a:p>
         </p:txBody>
@@ -10587,7 +10587,7 @@
                   <a:srgbClr val="172033"/>
                 </a:solidFill>
               </a:rPr>
-              <a:t>低</a:t>
+              <a:t>low</a:t>
             </a:r>
           </a:p>
         </p:txBody>
@@ -10641,14 +10641,14 @@
                   <a:srgbClr val="172033"/>
                 </a:solidFill>
               </a:rPr>
-              <a:t>低</a:t>
+              <a:t>low</a:t>
             </a:r>
           </a:p>
         </p:txBody>
       </p:sp>
       <p:sp>
         <p:nvSpPr>
-          <p:cNvPr id="285" name="管理洞察-rail">
+          <p:cNvPr id="285" name="management insights-rail">
             <a:extLst xmlns:a="http://schemas.openxmlformats.org/drawingml/2006/main">
               <a:ext uri="{FF2B5EF4-FFF2-40B4-BE49-F238E27FC236}">
                 <a16:creationId xmlns:a16="http://schemas.microsoft.com/office/drawing/2014/main" id="{24DE13F2-1268-4797-91A1-85A74020C495}"/>
@@ -10683,7 +10683,7 @@
       </p:sp>
       <p:sp>
         <p:nvSpPr>
-          <p:cNvPr id="286" name="管理洞察-title">
+          <p:cNvPr id="286" name="management insights-title">
             <a:extLst xmlns:a="http://schemas.openxmlformats.org/drawingml/2006/main">
               <a:ext uri="{FF2B5EF4-FFF2-40B4-BE49-F238E27FC236}">
                 <a16:creationId xmlns:a16="http://schemas.microsoft.com/office/drawing/2014/main" id="{D2C4DEC7-CE4C-497C-B716-814162E93E57}"/>
@@ -10726,14 +10726,14 @@
                   <a:srgbClr val="15375F"/>
                 </a:solidFill>
               </a:rPr>
-              <a:t>管理洞察</a:t>
+              <a:t>management insights</a:t>
             </a:r>
           </a:p>
         </p:txBody>
       </p:sp>
       <p:sp>
         <p:nvSpPr>
-          <p:cNvPr id="287" name="管理洞察-1">
+          <p:cNvPr id="287" name="management insights-1">
             <a:extLst xmlns:a="http://schemas.openxmlformats.org/drawingml/2006/main">
               <a:ext uri="{FF2B5EF4-FFF2-40B4-BE49-F238E27FC236}">
                 <a16:creationId xmlns:a16="http://schemas.microsoft.com/office/drawing/2014/main" id="{F849B0FA-0DE4-4088-8024-273D09964E03}"/>
@@ -10782,14 +10782,14 @@
                   <a:srgbClr val="172033"/>
                 </a:solidFill>
               </a:rPr>
-              <a:t>1  第 3 个月下降来自融入与岗位匹配</a:t>
+              <a:t>1  No. 3 Monthly decline comes from integration and job matching</a:t>
             </a:r>
           </a:p>
         </p:txBody>
       </p:sp>
       <p:sp>
         <p:nvSpPr>
-          <p:cNvPr id="288" name="管理洞察-2">
+          <p:cNvPr id="288" name="management insights-2">
             <a:extLst xmlns:a="http://schemas.openxmlformats.org/drawingml/2006/main">
               <a:ext uri="{FF2B5EF4-FFF2-40B4-BE49-F238E27FC236}">
                 <a16:creationId xmlns:a16="http://schemas.microsoft.com/office/drawing/2014/main" id="{5C35ABDE-9AA2-46E4-9E7A-5117BF339B0E}"/>
@@ -10838,14 +10838,14 @@
                   <a:srgbClr val="172033"/>
                 </a:solidFill>
               </a:rPr>
-              <a:t>2  第 13 个月下降来自晋升与调薪预期</a:t>
+              <a:t>2  No. 13 Monthly decline comes from promotion and salary increase expectations</a:t>
             </a:r>
           </a:p>
         </p:txBody>
       </p:sp>
       <p:sp>
         <p:nvSpPr>
-          <p:cNvPr id="289" name="管理洞察-3">
+          <p:cNvPr id="289" name="management insights-3">
             <a:extLst xmlns:a="http://schemas.openxmlformats.org/drawingml/2006/main">
               <a:ext uri="{FF2B5EF4-FFF2-40B4-BE49-F238E27FC236}">
                 <a16:creationId xmlns:a16="http://schemas.microsoft.com/office/drawing/2014/main" id="{4A7D2970-BF3F-4A21-BD11-2A094D37A380}"/>
@@ -10894,7 +10894,7 @@
                   <a:srgbClr val="172033"/>
                 </a:solidFill>
               </a:rPr>
-              <a:t>3  内推留存最好，可优先扩大渠道占比</a:t>
+              <a:t>3  Internal referrals are the best for retention and can be prioritized to expand channel share.</a:t>
             </a:r>
           </a:p>
         </p:txBody>
@@ -10950,7 +10950,7 @@
                   <a:srgbClr val="15375F"/>
                 </a:solidFill>
               </a:rPr>
-              <a:t>第 30/60/90 天设置干预节点，目标将 1 年留存提升至 75%</a:t>
+              <a:t>No. 30/60/90 Set intervention nodes every day, and the target will be 1 Annual retention increased to 75%</a:t>
             </a:r>
           </a:p>
         </p:txBody>
